--- a/Slides/Semana 4/semana_4_slides.pptx
+++ b/Slides/Semana 4/semana_4_slides.pptx
@@ -22,9 +22,10 @@
     <p:sldId id="270" r:id="rId16"/>
     <p:sldId id="271" r:id="rId17"/>
     <p:sldId id="272" r:id="rId18"/>
+    <p:sldId id="273" r:id="rId19"/>
   </p:sldIdLst>
   <p:notesMasterIdLst>
-    <p:notesMasterId r:id="rId19"/>
+    <p:notesMasterId r:id="rId20"/>
   </p:notesMasterIdLst>
   <p:sldSz cx="12192000" cy="6858000"/>
   <p:notesSz cx="6858000" cy="12192000"/>
@@ -518,7 +519,7 @@
           <a:p>
             <a:r>
               <a:rPr lang="en-US" dirty="0"/>
-              <a:t>Notas: Abertura da mini aula (20 min). Continuação direta da Semana 3 — o UV já foi ABERTO; agora vamos QUALIFICAR esse UV. A mensagem central da semana está no subtítulo: otimizar UV tem impacto direto e mensurável na qualidade da textura. Última semana da Unidade I. Não é tutorial de cliques — é construir o raciocínio "distorção -&gt; normalização -&gt; empacotamento".</a:t>
+              <a:t>Notas: Abertura da mini aula (20 min). Continuação direta da Semana 3 — o UV já foi ABERTO; agora vamos QUALIFICAR esse UV. A mensagem central da semana está no subtítulo: otimizar UV tem impacto direto e mensurável na qualidade da textura. Também é a semana em que o Asset 02 começa a receber UV. Última semana da Unidade I. Não é tutorial de cliques — é construir o raciocínio "distorção -&gt; normalização -&gt; empacotamento".</a:t>
             </a:r>
             <a:endParaRPr lang="en-US" dirty="0"/>
           </a:p>
@@ -606,7 +607,7 @@
           <a:p>
             <a:r>
               <a:rPr lang="en-US" dirty="0"/>
-              <a:t>Notas: Analogia física do plano de aula para fixar a diferença entre padding suficiente e excessivo. Usar se a turma travar no conceito abstrato de margin. Não transformar em discussão numérica — a ideia é a intuição.</a:t>
+              <a:t>Notas: Este diagrama é o núcleo procedimental da semana. Repetir verbalmente e projetar durante o estúdio: "Distorção -&gt; Normalização -&gt; Empacotamento". Inverter a ordem é o erro nº 1 da semana. O GitHub Action converte o bloco mermaid em imagem automaticamente — não é preciso gerar arquivo manualmente. Uma island distorcida é empacotada distorcida.</a:t>
             </a:r>
             <a:endParaRPr lang="en-US" dirty="0"/>
           </a:p>
@@ -694,7 +695,7 @@
           <a:p>
             <a:r>
               <a:rPr lang="en-US" dirty="0"/>
-              <a:t>Notas: Muitos estudantes não têm referência intuitiva de "70% de aproveitamento". Criar âncoras visuais concretas nomeando qualitativamente cada faixa. Na demonstração, mostrar os três níveis lado a lado. A meta de entrega é acima de 70%.</a:t>
+              <a:t>Notas: Analogia física do plano de aula para fixar a diferença entre padding suficiente e excessivo. Usar se a turma travar no conceito abstrato de margin. Não transformar em discussão numérica — a ideia é a intuição.</a:t>
             </a:r>
             <a:endParaRPr lang="en-US" dirty="0"/>
           </a:p>
@@ -782,7 +783,7 @@
           <a:p>
             <a:r>
               <a:rPr lang="en-US" dirty="0"/>
-              <a:t>Notas: Erro comum nº 2 da semana. Se o vermelho persiste após reposicionar seams, pedir que verifique ngons: Select &gt; All by Trait &gt; Faces by Sides. Se for geometria, o conserto é no modelo, não no UV. Diagnóstico antes de ação.</a:t>
+              <a:t>Notas: Muitos estudantes não têm referência intuitiva de "70% de aproveitamento". Criar âncoras visuais concretas nomeando qualitativamente cada faixa. Na demonstração, mostrar os três níveis lado a lado. A meta de entrega é acima de 70%.</a:t>
             </a:r>
             <a:endParaRPr lang="en-US" dirty="0"/>
           </a:p>
@@ -870,7 +871,7 @@
           <a:p>
             <a:r>
               <a:rPr lang="en-US" dirty="0"/>
-              <a:t>Notas: Os três erros mais frequentes da semana. O primeiro é de ORDEM, o segundo é de DIAGNÓSTICO, o terceiro é de CRITÉRIO. Fixar cada um com a solução durante a demo e circular no estúdio buscando exatamente esses padrões.</a:t>
+              <a:t>Notas: Erro comum nº 2 da semana. Se o vermelho persiste após reposicionar seams, pedir que verifique ngons: Select &gt; All by Trait &gt; Faces by Sides. Se for geometria, o conserto é no modelo, não no UV. Diagnóstico antes de ação.</a:t>
             </a:r>
             <a:endParaRPr lang="en-US" dirty="0"/>
           </a:p>
@@ -958,7 +959,7 @@
           <a:p>
             <a:r>
               <a:rPr lang="en-US" dirty="0"/>
-              <a:t>Notas: Contextualizar o valor profissional. Texel density inconsistente é um dos erros mais visíveis (e mais fáceis de evitar) em portfólios iniciantes. Amarra à Semana 6, onde o addon UVPackmaster é citado como recapitulação — reforçar que a ferramenta acelera, mas o julgamento sobre a proporção correta continua sendo do artista.</a:t>
+              <a:t>Notas: Os três erros mais frequentes da semana. O primeiro é de ORDEM, o segundo é de DIAGNÓSTICO, o terceiro é de CRITÉRIO. Fixar cada um com a solução durante a demo e circular no estúdio buscando exatamente esses padrões.</a:t>
             </a:r>
             <a:endParaRPr lang="en-US" dirty="0"/>
           </a:p>
@@ -1046,7 +1047,7 @@
           <a:p>
             <a:r>
               <a:rPr lang="en-US" dirty="0"/>
-              <a:t>Notas: Amarrar a mini aula. Cada item volta aplicado na produção em estúdio. Não reler tudo — apontar a conexão com o próximo passo: a demonstração de otimização ao vivo. Lembrar que é a última semana para deixar a base do UV pronta antes do PBR.</a:t>
+              <a:t>Notas: Contextualizar o valor profissional. Texel density inconsistente é um dos erros mais visíveis (e mais fáceis de evitar) em portfólios iniciantes. Amarra à Semana 6, onde o addon UVPackmaster é citado como recapitulação — reforçar que a ferramenta acelera, mas o julgamento sobre a proporção correta continua sendo do artista.</a:t>
             </a:r>
             <a:endParaRPr lang="en-US" dirty="0"/>
           </a:p>
@@ -1134,7 +1135,7 @@
           <a:p>
             <a:r>
               <a:rPr lang="en-US" dirty="0"/>
-              <a:t>Notas: Conectar ao semestre e ao Projeto Integrador. Um UV com problemas nesta semana gera retrabalho nas Semanas 5, 6 e além. Comunicar essa consequência com clareza — é o que motiva o cuidado no estúdio de hoje. A crítica desta semana é INFORMAL.</a:t>
+              <a:t>Notas: Amarrar a mini aula. Cada item volta aplicado na produção em estúdio. Não reler tudo — apontar a conexão com o próximo passo: a demonstração de otimização ao vivo. Lembrar que é a última semana para deixar a base do UV pronta antes do PBR.</a:t>
             </a:r>
             <a:endParaRPr lang="en-US" dirty="0"/>
           </a:p>
@@ -1222,7 +1223,95 @@
           <a:p>
             <a:r>
               <a:rPr lang="en-US" dirty="0"/>
-              <a:t>Notas: Transição para a demonstração de 20 min. Mesmo layout dividido das semanas anteriores: Viewport 3D à esquerda com checkerboard, UV Editor à direita com Stretch Overlay ativo. Sequência: diagnosticar vermelho -&gt; corrigir island -&gt; Average Islands Scale -&gt; Pack Islands -&gt; desfazer/refazer mostrando antes-depois. Manter o arquivo aberto durante o estúdio.
+              <a:t>Notas: Conectar ao semestre e ao Projeto Integrador. Um UV com problemas nesta semana gera retrabalho nas Semanas 5, 6 e além. Comunicar essa consequência com clareza — é o que motiva o cuidado no estúdio de hoje. A crítica desta semana é INFORMAL: sem Ficha de Crítica Formal nem Autoavaliação obrigatória — o registro de C3 é feito pela análise dos arquivos entregues. A próxima crítica formal é a da Semana 8 (a Semana 5 não tem crítica formal).</a:t>
+            </a:r>
+            <a:endParaRPr lang="en-US" dirty="0"/>
+          </a:p>
+        </p:txBody>
+      </p:sp>
+      <p:sp>
+        <p:nvSpPr>
+          <p:cNvPr id="4" name="Slide Number Placeholder 3"/>
+          <p:cNvSpPr>
+            <a:spLocks noGrp="1"/>
+          </p:cNvSpPr>
+          <p:nvPr>
+            <p:ph type="sldNum" sz="quarter" idx="10"/>
+          </p:nvPr>
+        </p:nvSpPr>
+        <p:spPr/>
+        <p:txBody>
+          <a:bodyPr/>
+          <a:lstStyle/>
+          <a:p>
+            <a:fld id="{F7021451-1387-4CA6-816F-3879F97B5CBC}" type="slidenum">
+              <a:rPr lang="en-US"/>
+              <a:t>17</a:t>
+            </a:fld>
+            <a:endParaRPr lang="en-US"/>
+          </a:p>
+        </p:txBody>
+      </p:sp>
+    </p:spTree>
+    <p:extLst>
+      <p:ext uri="{BB962C8B-B14F-4D97-AF65-F5344CB8AC3E}">
+        <p14:creationId xmlns:p14="http://schemas.microsoft.com/office/powerpoint/2010/main" val="1024086991"/>
+      </p:ext>
+    </p:extLst>
+  </p:cSld>
+  <p:clrMapOvr>
+    <a:masterClrMapping/>
+  </p:clrMapOvr>
+</p:notes>
+</file>
+
+<file path=ppt/notesSlides/notesSlide18.xml><?xml version="1.0" encoding="utf-8"?>
+<p:notes xmlns:a="http://schemas.openxmlformats.org/drawingml/2006/main" xmlns:r="http://schemas.openxmlformats.org/officeDocument/2006/relationships" xmlns:p="http://schemas.openxmlformats.org/presentationml/2006/main">
+  <p:cSld>
+    <p:spTree>
+      <p:nvGrpSpPr>
+        <p:cNvPr id="1" name=""/>
+        <p:cNvGrpSpPr/>
+        <p:nvPr/>
+      </p:nvGrpSpPr>
+      <p:grpSpPr>
+        <a:xfrm>
+          <a:off x="0" y="0"/>
+          <a:ext cx="0" cy="0"/>
+          <a:chOff x="0" y="0"/>
+          <a:chExt cx="0" cy="0"/>
+        </a:xfrm>
+      </p:grpSpPr>
+      <p:sp>
+        <p:nvSpPr>
+          <p:cNvPr id="2" name="Slide Image Placeholder 1"/>
+          <p:cNvSpPr>
+            <a:spLocks noGrp="1" noRot="1" noChangeAspect="1"/>
+          </p:cNvSpPr>
+          <p:nvPr>
+            <p:ph type="sldImg"/>
+          </p:nvPr>
+        </p:nvSpPr>
+        <p:spPr/>
+      </p:sp>
+      <p:sp>
+        <p:nvSpPr>
+          <p:cNvPr id="3" name="Notes Placeholder 2"/>
+          <p:cNvSpPr>
+            <a:spLocks noGrp="1"/>
+          </p:cNvSpPr>
+          <p:nvPr>
+            <p:ph type="body" idx="1"/>
+          </p:nvPr>
+        </p:nvSpPr>
+        <p:spPr/>
+        <p:txBody>
+          <a:bodyPr/>
+          <a:lstStyle/>
+          <a:p>
+            <a:r>
+              <a:rPr lang="en-US" dirty="0"/>
+              <a:t>Notas: Transição para a demonstração de 20 min (o mesmo processo se aplica depois ao Asset 02 no estúdio). Mesmo layout dividido das semanas anteriores: Viewport 3D à esquerda com checkerboard, UV Editor à direita com Stretch Overlay ativo. Sequência: diagnosticar vermelho -&gt; corrigir island -&gt; Average Islands Scale -&gt; Pack Islands -&gt; desfazer/refazer mostrando antes-depois. Manter o arquivo aberto durante o estúdio. Depois da demonstração (não coberto em slides): 50 min de estúdio no Encontro 1 (Asset 01 otimização + Asset 02 abertura inicial), Encontro 2 abre com 20 min de crítica coletiva informal comparando Stretch Overlays de 3 UVs, seguidos de 60 min de estúdio para finalizar Asset 01 e avançar no Asset 02, e fechamento de 10 min antecipando a Semana 5.
 [!FIGURA]
 Objetivo didático: orientar o layout de tela da demonstração e antecipar o resultado esperado da otimização, dando à turma um alvo visual claro para o próprio trabalho.
 Arquivo sugerido: assets/demo_layout_semana04.webp
@@ -1250,7 +1339,7 @@
           <a:p>
             <a:fld id="{F7021451-1387-4CA6-816F-3879F97B5CBC}" type="slidenum">
               <a:rPr lang="en-US"/>
-              <a:t>17</a:t>
+              <a:t>18</a:t>
             </a:fld>
             <a:endParaRPr lang="en-US"/>
           </a:p>
@@ -1315,7 +1404,7 @@
           <a:p>
             <a:r>
               <a:rPr lang="en-US" dirty="0"/>
-              <a:t>Notas: Ler rápido. Cada objetivo volta ao longo da aula. Não antecipar PBR (Semana 5) nem Texture Atlas (Semana 13). O foco é qualificar o UV que já foi aberto na Semana 3.</a:t>
+              <a:t>Notas: Ler rápido. Cada objetivo volta ao longo da aula. Não antecipar PBR (Semana 5) nem Texture Atlas (Semana 13). Os quatro primeiros objetivos qualificam o UV do Asset 01, já aberto na Semana 3; o quinto abre a frente do Asset 02 — critério C3 da rubrica cobre os dois assets nesta semana.</a:t>
             </a:r>
             <a:endParaRPr lang="en-US" dirty="0"/>
           </a:p>
@@ -1403,7 +1492,7 @@
           <a:p>
             <a:r>
               <a:rPr lang="en-US" dirty="0"/>
-              <a:t>Notas: Mostrar aqui a comparação visual (figura abaixo). Deixar 2-3 respostas da turma antes de revelar a causa: texel density inconsistente. Não corrigir — usar as respostas como ponte para o conceito.</a:t>
+              <a:t>Notas: Contextualizar a estrutura dos dois encontros antes de entrar na mini aula técnica. O Asset 02 é conteúdo novo desta semana — reforçar que os mesmos critérios de seams da Semana 3 (C3) já se aplicam sem precisar de uma rodada de correção depois. As ferramentas de otimização (Stretch Overlay, Average Islands Scale, Pack Islands) valem para os dois assets.</a:t>
             </a:r>
             <a:endParaRPr lang="en-US" dirty="0"/>
           </a:p>
@@ -1446,6 +1535,94 @@
 </file>
 
 <file path=ppt/notesSlides/notesSlide4.xml><?xml version="1.0" encoding="utf-8"?>
+<p:notes xmlns:a="http://schemas.openxmlformats.org/drawingml/2006/main" xmlns:r="http://schemas.openxmlformats.org/officeDocument/2006/relationships" xmlns:p="http://schemas.openxmlformats.org/presentationml/2006/main">
+  <p:cSld>
+    <p:spTree>
+      <p:nvGrpSpPr>
+        <p:cNvPr id="1" name=""/>
+        <p:cNvGrpSpPr/>
+        <p:nvPr/>
+      </p:nvGrpSpPr>
+      <p:grpSpPr>
+        <a:xfrm>
+          <a:off x="0" y="0"/>
+          <a:ext cx="0" cy="0"/>
+          <a:chOff x="0" y="0"/>
+          <a:chExt cx="0" cy="0"/>
+        </a:xfrm>
+      </p:grpSpPr>
+      <p:sp>
+        <p:nvSpPr>
+          <p:cNvPr id="2" name="Slide Image Placeholder 1"/>
+          <p:cNvSpPr>
+            <a:spLocks noGrp="1" noRot="1" noChangeAspect="1"/>
+          </p:cNvSpPr>
+          <p:nvPr>
+            <p:ph type="sldImg"/>
+          </p:nvPr>
+        </p:nvSpPr>
+        <p:spPr/>
+      </p:sp>
+      <p:sp>
+        <p:nvSpPr>
+          <p:cNvPr id="3" name="Notes Placeholder 2"/>
+          <p:cNvSpPr>
+            <a:spLocks noGrp="1"/>
+          </p:cNvSpPr>
+          <p:nvPr>
+            <p:ph type="body" idx="1"/>
+          </p:nvPr>
+        </p:nvSpPr>
+        <p:spPr/>
+        <p:txBody>
+          <a:bodyPr/>
+          <a:lstStyle/>
+          <a:p>
+            <a:r>
+              <a:rPr lang="en-US" dirty="0"/>
+              <a:t>Notas: Mostrar aqui a comparação visual (figura abaixo). Deixar 2-3 respostas da turma antes de revelar a causa: texel density inconsistente. Não corrigir — usar as respostas como ponte para o conceito.</a:t>
+            </a:r>
+            <a:endParaRPr lang="en-US" dirty="0"/>
+          </a:p>
+        </p:txBody>
+      </p:sp>
+      <p:sp>
+        <p:nvSpPr>
+          <p:cNvPr id="4" name="Slide Number Placeholder 3"/>
+          <p:cNvSpPr>
+            <a:spLocks noGrp="1"/>
+          </p:cNvSpPr>
+          <p:nvPr>
+            <p:ph type="sldNum" sz="quarter" idx="10"/>
+          </p:nvPr>
+        </p:nvSpPr>
+        <p:spPr/>
+        <p:txBody>
+          <a:bodyPr/>
+          <a:lstStyle/>
+          <a:p>
+            <a:fld id="{F7021451-1387-4CA6-816F-3879F97B5CBC}" type="slidenum">
+              <a:rPr lang="en-US"/>
+              <a:t>4</a:t>
+            </a:fld>
+            <a:endParaRPr lang="en-US"/>
+          </a:p>
+        </p:txBody>
+      </p:sp>
+    </p:spTree>
+    <p:extLst>
+      <p:ext uri="{BB962C8B-B14F-4D97-AF65-F5344CB8AC3E}">
+        <p14:creationId xmlns:p14="http://schemas.microsoft.com/office/powerpoint/2010/main" val="1024086991"/>
+      </p:ext>
+    </p:extLst>
+  </p:cSld>
+  <p:clrMapOvr>
+    <a:masterClrMapping/>
+  </p:clrMapOvr>
+</p:notes>
+</file>
+
+<file path=ppt/notesSlides/notesSlide5.xml><?xml version="1.0" encoding="utf-8"?>
 <p:notes xmlns:a="http://schemas.openxmlformats.org/drawingml/2006/main" xmlns:r="http://schemas.openxmlformats.org/officeDocument/2006/relationships" xmlns:p="http://schemas.openxmlformats.org/presentationml/2006/main">
   <p:cSld>
     <p:spTree>
@@ -1519,7 +1696,7 @@
           <a:p>
             <a:fld id="{F7021451-1387-4CA6-816F-3879F97B5CBC}" type="slidenum">
               <a:rPr lang="en-US"/>
-              <a:t>4</a:t>
+              <a:t>5</a:t>
             </a:fld>
             <a:endParaRPr lang="en-US"/>
           </a:p>
@@ -1538,7 +1715,7 @@
 </p:notes>
 </file>
 
-<file path=ppt/notesSlides/notesSlide5.xml><?xml version="1.0" encoding="utf-8"?>
+<file path=ppt/notesSlides/notesSlide6.xml><?xml version="1.0" encoding="utf-8"?>
 <p:notes xmlns:a="http://schemas.openxmlformats.org/drawingml/2006/main" xmlns:r="http://schemas.openxmlformats.org/officeDocument/2006/relationships" xmlns:p="http://schemas.openxmlformats.org/presentationml/2006/main">
   <p:cSld>
     <p:spTree>
@@ -1607,7 +1784,7 @@
           <a:p>
             <a:fld id="{F7021451-1387-4CA6-816F-3879F97B5CBC}" type="slidenum">
               <a:rPr lang="en-US"/>
-              <a:t>5</a:t>
+              <a:t>6</a:t>
             </a:fld>
             <a:endParaRPr lang="en-US"/>
           </a:p>
@@ -1626,7 +1803,7 @@
 </p:notes>
 </file>
 
-<file path=ppt/notesSlides/notesSlide6.xml><?xml version="1.0" encoding="utf-8"?>
+<file path=ppt/notesSlides/notesSlide7.xml><?xml version="1.0" encoding="utf-8"?>
 <p:notes xmlns:a="http://schemas.openxmlformats.org/drawingml/2006/main" xmlns:r="http://schemas.openxmlformats.org/officeDocument/2006/relationships" xmlns:p="http://schemas.openxmlformats.org/presentationml/2006/main">
   <p:cSld>
     <p:spTree>
@@ -1695,7 +1872,7 @@
           <a:p>
             <a:fld id="{F7021451-1387-4CA6-816F-3879F97B5CBC}" type="slidenum">
               <a:rPr lang="en-US"/>
-              <a:t>6</a:t>
+              <a:t>7</a:t>
             </a:fld>
             <a:endParaRPr lang="en-US"/>
           </a:p>
@@ -1714,7 +1891,7 @@
 </p:notes>
 </file>
 
-<file path=ppt/notesSlides/notesSlide7.xml><?xml version="1.0" encoding="utf-8"?>
+<file path=ppt/notesSlides/notesSlide8.xml><?xml version="1.0" encoding="utf-8"?>
 <p:notes xmlns:a="http://schemas.openxmlformats.org/drawingml/2006/main" xmlns:r="http://schemas.openxmlformats.org/officeDocument/2006/relationships" xmlns:p="http://schemas.openxmlformats.org/presentationml/2006/main">
   <p:cSld>
     <p:spTree>
@@ -1783,7 +1960,7 @@
           <a:p>
             <a:fld id="{F7021451-1387-4CA6-816F-3879F97B5CBC}" type="slidenum">
               <a:rPr lang="en-US"/>
-              <a:t>7</a:t>
+              <a:t>8</a:t>
             </a:fld>
             <a:endParaRPr lang="en-US"/>
           </a:p>
@@ -1802,7 +1979,7 @@
 </p:notes>
 </file>
 
-<file path=ppt/notesSlides/notesSlide8.xml><?xml version="1.0" encoding="utf-8"?>
+<file path=ppt/notesSlides/notesSlide9.xml><?xml version="1.0" encoding="utf-8"?>
 <p:notes xmlns:a="http://schemas.openxmlformats.org/drawingml/2006/main" xmlns:r="http://schemas.openxmlformats.org/officeDocument/2006/relationships" xmlns:p="http://schemas.openxmlformats.org/presentationml/2006/main">
   <p:cSld>
     <p:spTree>
@@ -1849,94 +2026,6 @@
             <a:r>
               <a:rPr lang="en-US" dirty="0"/>
               <a:t>Notas: Padding maior evita bleeding em mipmaps, mas desperdiça espaço. Não usar/demonstrar UVPackmaster nesta aula — para não sobrecarregar a mini-aula, ele é citado apenas como nome e retomado com 5 min de recapitulação no início da Semana 6, quando o Asset 01 já estiver pronto para receber textura. Hoje o Pack Islands nativo do Blender é suficiente para o Asset 01 e o Asset 02.</a:t>
-            </a:r>
-            <a:endParaRPr lang="en-US" dirty="0"/>
-          </a:p>
-        </p:txBody>
-      </p:sp>
-      <p:sp>
-        <p:nvSpPr>
-          <p:cNvPr id="4" name="Slide Number Placeholder 3"/>
-          <p:cNvSpPr>
-            <a:spLocks noGrp="1"/>
-          </p:cNvSpPr>
-          <p:nvPr>
-            <p:ph type="sldNum" sz="quarter" idx="10"/>
-          </p:nvPr>
-        </p:nvSpPr>
-        <p:spPr/>
-        <p:txBody>
-          <a:bodyPr/>
-          <a:lstStyle/>
-          <a:p>
-            <a:fld id="{F7021451-1387-4CA6-816F-3879F97B5CBC}" type="slidenum">
-              <a:rPr lang="en-US"/>
-              <a:t>8</a:t>
-            </a:fld>
-            <a:endParaRPr lang="en-US"/>
-          </a:p>
-        </p:txBody>
-      </p:sp>
-    </p:spTree>
-    <p:extLst>
-      <p:ext uri="{BB962C8B-B14F-4D97-AF65-F5344CB8AC3E}">
-        <p14:creationId xmlns:p14="http://schemas.microsoft.com/office/powerpoint/2010/main" val="1024086991"/>
-      </p:ext>
-    </p:extLst>
-  </p:cSld>
-  <p:clrMapOvr>
-    <a:masterClrMapping/>
-  </p:clrMapOvr>
-</p:notes>
-</file>
-
-<file path=ppt/notesSlides/notesSlide9.xml><?xml version="1.0" encoding="utf-8"?>
-<p:notes xmlns:a="http://schemas.openxmlformats.org/drawingml/2006/main" xmlns:r="http://schemas.openxmlformats.org/officeDocument/2006/relationships" xmlns:p="http://schemas.openxmlformats.org/presentationml/2006/main">
-  <p:cSld>
-    <p:spTree>
-      <p:nvGrpSpPr>
-        <p:cNvPr id="1" name=""/>
-        <p:cNvGrpSpPr/>
-        <p:nvPr/>
-      </p:nvGrpSpPr>
-      <p:grpSpPr>
-        <a:xfrm>
-          <a:off x="0" y="0"/>
-          <a:ext cx="0" cy="0"/>
-          <a:chOff x="0" y="0"/>
-          <a:chExt cx="0" cy="0"/>
-        </a:xfrm>
-      </p:grpSpPr>
-      <p:sp>
-        <p:nvSpPr>
-          <p:cNvPr id="2" name="Slide Image Placeholder 1"/>
-          <p:cNvSpPr>
-            <a:spLocks noGrp="1" noRot="1" noChangeAspect="1"/>
-          </p:cNvSpPr>
-          <p:nvPr>
-            <p:ph type="sldImg"/>
-          </p:nvPr>
-        </p:nvSpPr>
-        <p:spPr/>
-      </p:sp>
-      <p:sp>
-        <p:nvSpPr>
-          <p:cNvPr id="3" name="Notes Placeholder 2"/>
-          <p:cNvSpPr>
-            <a:spLocks noGrp="1"/>
-          </p:cNvSpPr>
-          <p:nvPr>
-            <p:ph type="body" idx="1"/>
-          </p:nvPr>
-        </p:nvSpPr>
-        <p:spPr/>
-        <p:txBody>
-          <a:bodyPr/>
-          <a:lstStyle/>
-          <a:p>
-            <a:r>
-              <a:rPr lang="en-US" dirty="0"/>
-              <a:t>Notas: Este diagrama é o núcleo procedimental da semana. Repetir verbalmente e projetar durante o estúdio: "Distorção -&gt; Normalização -&gt; Empacotamento". Inverter a ordem é o erro nº 1 da semana. O GitHub Action converte o bloco mermaid em imagem automaticamente — não é preciso gerar arquivo manualmente. Uma island distorcida é empacotada distorcida.</a:t>
             </a:r>
             <a:endParaRPr lang="en-US" dirty="0"/>
           </a:p>
@@ -2600,6 +2689,45 @@
 <file path=ppt/slides/slide17.xml><?xml version="1.0" encoding="utf-8"?>
 <p:sld xmlns:a="http://schemas.openxmlformats.org/drawingml/2006/main" xmlns:r="http://schemas.openxmlformats.org/officeDocument/2006/relationships" xmlns:p="http://schemas.openxmlformats.org/presentationml/2006/main">
   <p:cSld name="Slide 17">
+    <p:bg>
+      <p:bgPr>
+        <a:blipFill dpi="0" rotWithShape="1">
+          <a:blip r:embed="rId1">
+            <a:lum/>
+          </a:blip>
+          <a:srcRect/>
+          <a:stretch>
+            <a:fillRect/>
+          </a:stretch>
+        </a:blipFill>
+        <a:effectLst/>
+      </p:bgPr>
+    </p:bg>
+    <p:spTree>
+      <p:nvGrpSpPr>
+        <p:cNvPr id="1" name=""/>
+        <p:cNvGrpSpPr/>
+        <p:nvPr/>
+      </p:nvGrpSpPr>
+      <p:grpSpPr>
+        <a:xfrm>
+          <a:off x="0" y="0"/>
+          <a:ext cx="0" cy="0"/>
+          <a:chOff x="0" y="0"/>
+          <a:chExt cx="0" cy="0"/>
+        </a:xfrm>
+      </p:grpSpPr>
+    </p:spTree>
+  </p:cSld>
+  <p:clrMapOvr>
+    <a:masterClrMapping/>
+  </p:clrMapOvr>
+</p:sld>
+</file>
+
+<file path=ppt/slides/slide18.xml><?xml version="1.0" encoding="utf-8"?>
+<p:sld xmlns:a="http://schemas.openxmlformats.org/drawingml/2006/main" xmlns:r="http://schemas.openxmlformats.org/officeDocument/2006/relationships" xmlns:p="http://schemas.openxmlformats.org/presentationml/2006/main">
+  <p:cSld name="Slide 18">
     <p:bg>
       <p:bgPr>
         <a:blipFill dpi="0" rotWithShape="1">

--- a/Slides/Semana 4/semana_4_slides.pptx
+++ b/Slides/Semana 4/semana_4_slides.pptx
@@ -23,9 +23,10 @@
     <p:sldId id="271" r:id="rId17"/>
     <p:sldId id="272" r:id="rId18"/>
     <p:sldId id="273" r:id="rId19"/>
+    <p:sldId id="274" r:id="rId20"/>
   </p:sldIdLst>
   <p:notesMasterIdLst>
-    <p:notesMasterId r:id="rId20"/>
+    <p:notesMasterId r:id="rId21"/>
   </p:notesMasterIdLst>
   <p:sldSz cx="12192000" cy="6858000"/>
   <p:notesSz cx="6858000" cy="12192000"/>
@@ -519,7 +520,7 @@
           <a:p>
             <a:r>
               <a:rPr lang="en-US" dirty="0"/>
-              <a:t>Notas: Abertura da mini aula (20 min). Continuação direta da Semana 3 — o UV já foi ABERTO; agora vamos QUALIFICAR esse UV. A mensagem central da semana está no subtítulo: otimizar UV tem impacto direto e mensurável na qualidade da textura. Também é a semana em que o Asset 02 começa a receber UV. Última semana da Unidade I. Não é tutorial de cliques — é construir o raciocínio "distorção -&gt; normalização -&gt; empacotamento".</a:t>
+              <a:t>Notas: Abrir marcando a virada: até aqui (Semana 3) o Hero Asset era decisão e justificativa escrita. Hoje ele chega modelado, pela primeira vez, e a turma abre o UV dele de verdade. É também a primeira Crítica Formal do semestre — dizer isso já na abertura, sem alarmismo.</a:t>
             </a:r>
             <a:endParaRPr lang="en-US" dirty="0"/>
           </a:p>
@@ -607,7 +608,7 @@
           <a:p>
             <a:r>
               <a:rPr lang="en-US" dirty="0"/>
-              <a:t>Notas: Este diagrama é o núcleo procedimental da semana. Repetir verbalmente e projetar durante o estúdio: "Distorção -&gt; Normalização -&gt; Empacotamento". Inverter a ordem é o erro nº 1 da semana. O GitHub Action converte o bloco mermaid em imagem automaticamente — não é preciso gerar arquivo manualmente. Uma island distorcida é empacotada distorcida.</a:t>
+              <a:t>Notas: Amarrar ao C3 (UV Mapping) da Rubrica Mestre, foco principal da CF1 de hoje.</a:t>
             </a:r>
             <a:endParaRPr lang="en-US" dirty="0"/>
           </a:p>
@@ -695,7 +696,7 @@
           <a:p>
             <a:r>
               <a:rPr lang="en-US" dirty="0"/>
-              <a:t>Notas: Analogia física do plano de aula para fixar a diferença entre padding suficiente e excessivo. Usar se a turma travar no conceito abstrato de margin. Não transformar em discussão numérica — a ideia é a intuição.</a:t>
+              <a:t>Notas: Fechar a mini aula amarrando os conceitos antes da demonstração.</a:t>
             </a:r>
             <a:endParaRPr lang="en-US" dirty="0"/>
           </a:p>
@@ -783,7 +784,12 @@
           <a:p>
             <a:r>
               <a:rPr lang="en-US" dirty="0"/>
-              <a:t>Notas: Muitos estudantes não têm referência intuitiva de "70% de aproveitamento". Criar âncoras visuais concretas nomeando qualitativamente cada faixa. Na demonstração, mostrar os três níveis lado a lado. A meta de entrega é acima de 70%.</a:t>
+              <a:t>Notas: Transição para os 20 min de demonstração.
+[!FIGURA]
+Objetivo didático — Mostrar visualmente a diferença de qualidade entre um UV resolvido só por Smart UV Project e o mesmo objeto com seams manuais, islands organizadas e Pack Islands aplicado.
+Arquivo sugerido — assets/uv_comparacao_smart_manual.webp
+Descrição — Duas capturas de tela lado a lado do mesmo prop no UV Editor do Blender: à esquerda, resultado do Smart UV Project (islands fragmentadas, aproveitamento mediano); à direita, resultado após seams manuais + Pack Islands (islands organizadas, aproveitamento alto), ambas com checkerboard aplicado no Viewport ao fundo.
+Como produzir — Capturar no Blender com o prop de demonstração do professor, exportando as duas telas no mesmo enquadramento para comparação direta.</a:t>
             </a:r>
             <a:endParaRPr lang="en-US" dirty="0"/>
           </a:p>
@@ -871,7 +877,7 @@
           <a:p>
             <a:r>
               <a:rPr lang="en-US" dirty="0"/>
-              <a:t>Notas: Erro comum nº 2 da semana. Se o vermelho persiste após reposicionar seams, pedir que verifique ngons: Select &gt; All by Trait &gt; Faces by Sides. Se for geometria, o conserto é no modelo, não no UV. Diagnóstico antes de ação.</a:t>
+              <a:t>Notas: Divisória entre a mini aula e o estúdio. Os slides a seguir ficam projetados durante a produção — servem de consigna e timebox visíveis, apresentados um a um conforme a etapa correspondente começa.</a:t>
             </a:r>
             <a:endParaRPr lang="en-US" dirty="0"/>
           </a:p>
@@ -959,7 +965,7 @@
           <a:p>
             <a:r>
               <a:rPr lang="en-US" dirty="0"/>
-              <a:t>Notas: Os três erros mais frequentes da semana. O primeiro é de ORDEM, o segundo é de DIAGNÓSTICO, o terceiro é de CRITÉRIO. Fixar cada um com a solução durante a demo e circular no estúdio buscando exatamente esses padrões.</a:t>
+              <a:t>Notas: Encontro 1. Circular perguntando onde a malha concentra mais complexidade de forma, antes de qualquer corte manual.</a:t>
             </a:r>
             <a:endParaRPr lang="en-US" dirty="0"/>
           </a:p>
@@ -1047,7 +1053,7 @@
           <a:p>
             <a:r>
               <a:rPr lang="en-US" dirty="0"/>
-              <a:t>Notas: Contextualizar o valor profissional. Texel density inconsistente é um dos erros mais visíveis (e mais fáceis de evitar) em portfólios iniciantes. Amarra à Semana 6, onde o addon UVPackmaster é citado como recapitulação — reforçar que a ferramenta acelera, mas o julgamento sobre a proporção correta continua sendo do artista.</a:t>
+              <a:t>Notas: Perguntar: "Por que você cortou o seam aqui e não ali? Essa costura vai aparecer na peça final?" Identificar seams excessivamente fragmentados.</a:t>
             </a:r>
             <a:endParaRPr lang="en-US" dirty="0"/>
           </a:p>
@@ -1135,7 +1141,7 @@
           <a:p>
             <a:r>
               <a:rPr lang="en-US" dirty="0"/>
-              <a:t>Notas: Amarrar a mini aula. Cada item volta aplicado na produção em estúdio. Não reler tudo — apontar a conexão com o próximo passo: a demonstração de otimização ao vivo. Lembrar que é a última semana para deixar a base do UV pronta antes do PBR.</a:t>
+              <a:t>Notas: O refinamento final acontece no início do Encontro 2, antes da Crítica Formal. Identificar quem ainda tem distorção não resolvida — atenção prioritária amanhã.</a:t>
             </a:r>
             <a:endParaRPr lang="en-US" dirty="0"/>
           </a:p>
@@ -1223,7 +1229,7 @@
           <a:p>
             <a:r>
               <a:rPr lang="en-US" dirty="0"/>
-              <a:t>Notas: Conectar ao semestre e ao Projeto Integrador. Um UV com problemas nesta semana gera retrabalho nas Semanas 5, 6 e além. Comunicar essa consequência com clareza — é o que motiva o cuidado no estúdio de hoje. A crítica desta semana é INFORMAL: sem Ficha de Crítica Formal nem Autoavaliação obrigatória — o registro de C3 é feito pela análise dos arquivos entregues. A próxima crítica formal é a da Semana 8 (a Semana 5 não tem crítica formal).</a:t>
+              <a:t>Notas: Abertura do Encontro 2. Verificar que todos têm a Ficha de Autoavaliação preenchida antes do início das apresentações.</a:t>
             </a:r>
             <a:endParaRPr lang="en-US" dirty="0"/>
           </a:p>
@@ -1311,12 +1317,7 @@
           <a:p>
             <a:r>
               <a:rPr lang="en-US" dirty="0"/>
-              <a:t>Notas: Transição para a demonstração de 20 min (o mesmo processo se aplica depois ao Asset 02 no estúdio). Mesmo layout dividido das semanas anteriores: Viewport 3D à esquerda com checkerboard, UV Editor à direita com Stretch Overlay ativo. Sequência: diagnosticar vermelho -&gt; corrigir island -&gt; Average Islands Scale -&gt; Pack Islands -&gt; desfazer/refazer mostrando antes-depois. Manter o arquivo aberto durante o estúdio. Depois da demonstração (não coberto em slides): 50 min de estúdio no Encontro 1 (Asset 01 otimização + Asset 02 abertura inicial), Encontro 2 abre com 20 min de crítica coletiva informal comparando Stretch Overlays de 3 UVs, seguidos de 60 min de estúdio para finalizar Asset 01 e avançar no Asset 02, e fechamento de 10 min antecipando a Semana 5.
-[!FIGURA]
-Objetivo didático: orientar o layout de tela da demonstração e antecipar o resultado esperado da otimização, dando à turma um alvo visual claro para o próprio trabalho.
-Arquivo sugerido: assets/demo_layout_semana04.webp
-Descrição: captura do Blender com janela dividida — à esquerda o prop do kit em Material Preview com checkerboard uniforme; à direita o UV Editor com Stretch Overlay predominantemente azul e islands empacotadas ocupando bem o quadrado 0-1.
-Como produzir: no Blender, montar o layout dividido, aplicar checkerboard, ativar o Stretch Overlay, executar Average Islands Scale e Pack Islands no prop de demonstração. Capturar a tela cheia com os dois painéis mostrando o estado OTIMIZADO.</a:t>
+              <a:t>Notas: Cerca de 3 min por estudante, ajustar ao tamanho da turma. Perguntas focadas em C3: "Essa distorção compromete a textura futura?", "Esse aproveitamento de espaço está adequado?" Ficha de Crítica Formal preenchida durante ou logo após cada apresentação.</a:t>
             </a:r>
             <a:endParaRPr lang="en-US" dirty="0"/>
           </a:p>
@@ -1358,6 +1359,94 @@
 </p:notes>
 </file>
 
+<file path=ppt/notesSlides/notesSlide19.xml><?xml version="1.0" encoding="utf-8"?>
+<p:notes xmlns:a="http://schemas.openxmlformats.org/drawingml/2006/main" xmlns:r="http://schemas.openxmlformats.org/officeDocument/2006/relationships" xmlns:p="http://schemas.openxmlformats.org/presentationml/2006/main">
+  <p:cSld>
+    <p:spTree>
+      <p:nvGrpSpPr>
+        <p:cNvPr id="1" name=""/>
+        <p:cNvGrpSpPr/>
+        <p:nvPr/>
+      </p:nvGrpSpPr>
+      <p:grpSpPr>
+        <a:xfrm>
+          <a:off x="0" y="0"/>
+          <a:ext cx="0" cy="0"/>
+          <a:chOff x="0" y="0"/>
+          <a:chExt cx="0" cy="0"/>
+        </a:xfrm>
+      </p:grpSpPr>
+      <p:sp>
+        <p:nvSpPr>
+          <p:cNvPr id="2" name="Slide Image Placeholder 1"/>
+          <p:cNvSpPr>
+            <a:spLocks noGrp="1" noRot="1" noChangeAspect="1"/>
+          </p:cNvSpPr>
+          <p:nvPr>
+            <p:ph type="sldImg"/>
+          </p:nvPr>
+        </p:nvSpPr>
+        <p:spPr/>
+      </p:sp>
+      <p:sp>
+        <p:nvSpPr>
+          <p:cNvPr id="3" name="Notes Placeholder 2"/>
+          <p:cNvSpPr>
+            <a:spLocks noGrp="1"/>
+          </p:cNvSpPr>
+          <p:nvPr>
+            <p:ph type="body" idx="1"/>
+          </p:nvPr>
+        </p:nvSpPr>
+        <p:spPr/>
+        <p:txBody>
+          <a:bodyPr/>
+          <a:lstStyle/>
+          <a:p>
+            <a:r>
+              <a:rPr lang="en-US" dirty="0"/>
+              <a:t>Notas: Fechamento (10 min): "O UV que vocês abriram hoje é o endereço onde toda textura, todo material e toda pintura das próximas semanas vai morar." Reflexão individual: "O feedback que mais me surpreendeu na CF1 foi ___. Na Semana 5, vou corrigir ___ primeiro." Ponte: na Semana 5 corrigem o UV com base no feedback e entram no Shader Editor pela primeira vez.</a:t>
+            </a:r>
+            <a:endParaRPr lang="en-US" dirty="0"/>
+          </a:p>
+        </p:txBody>
+      </p:sp>
+      <p:sp>
+        <p:nvSpPr>
+          <p:cNvPr id="4" name="Slide Number Placeholder 3"/>
+          <p:cNvSpPr>
+            <a:spLocks noGrp="1"/>
+          </p:cNvSpPr>
+          <p:nvPr>
+            <p:ph type="sldNum" sz="quarter" idx="10"/>
+          </p:nvPr>
+        </p:nvSpPr>
+        <p:spPr/>
+        <p:txBody>
+          <a:bodyPr/>
+          <a:lstStyle/>
+          <a:p>
+            <a:fld id="{F7021451-1387-4CA6-816F-3879F97B5CBC}" type="slidenum">
+              <a:rPr lang="en-US"/>
+              <a:t>19</a:t>
+            </a:fld>
+            <a:endParaRPr lang="en-US"/>
+          </a:p>
+        </p:txBody>
+      </p:sp>
+    </p:spTree>
+    <p:extLst>
+      <p:ext uri="{BB962C8B-B14F-4D97-AF65-F5344CB8AC3E}">
+        <p14:creationId xmlns:p14="http://schemas.microsoft.com/office/powerpoint/2010/main" val="1024086991"/>
+      </p:ext>
+    </p:extLst>
+  </p:cSld>
+  <p:clrMapOvr>
+    <a:masterClrMapping/>
+  </p:clrMapOvr>
+</p:notes>
+</file>
+
 <file path=ppt/notesSlides/notesSlide2.xml><?xml version="1.0" encoding="utf-8"?>
 <p:notes xmlns:a="http://schemas.openxmlformats.org/drawingml/2006/main" xmlns:r="http://schemas.openxmlformats.org/officeDocument/2006/relationships" xmlns:p="http://schemas.openxmlformats.org/presentationml/2006/main">
   <p:cSld>
@@ -1404,7 +1493,7 @@
           <a:p>
             <a:r>
               <a:rPr lang="en-US" dirty="0"/>
-              <a:t>Notas: Ler rápido. Cada objetivo volta ao longo da aula. Não antecipar PBR (Semana 5) nem Texture Atlas (Semana 13). Os quatro primeiros objetivos qualificam o UV do Asset 01, já aberto na Semana 3; o quinto abre a frente do Asset 02 — critério C3 da rubrica cobre os dois assets nesta semana.</a:t>
+              <a:t>Notas: Recapitular em uma frase cada semana, sem reabrir conteúdo técnico de projeção UV (Semana 2) nem a lógica dos três critérios de escolha (Semana 3) — isso já foi ensinado. Só situar o fluxo.</a:t>
             </a:r>
             <a:endParaRPr lang="en-US" dirty="0"/>
           </a:p>
@@ -1492,7 +1581,7 @@
           <a:p>
             <a:r>
               <a:rPr lang="en-US" dirty="0"/>
-              <a:t>Notas: Contextualizar a estrutura dos dois encontros antes de entrar na mini aula técnica. O Asset 02 é conteúdo novo desta semana — reforçar que os mesmos critérios de seams da Semana 3 (C3) já se aplicam sem precisar de uma rodada de correção depois. As ferramentas de otimização (Stretch Overlay, Average Islands Scale, Pack Islands) valem para os dois assets.</a:t>
+              <a:t>Notas: Os três primeiros objetivos são cobertos na mini aula e na demonstração; os dois últimos são o trabalho do estúdio de hoje, fechado na Crítica Formal do Encontro 2.</a:t>
             </a:r>
             <a:endParaRPr lang="en-US" dirty="0"/>
           </a:p>
@@ -1580,7 +1669,7 @@
           <a:p>
             <a:r>
               <a:rPr lang="en-US" dirty="0"/>
-              <a:t>Notas: Mostrar aqui a comparação visual (figura abaixo). Deixar 2-3 respostas da turma antes de revelar a causa: texel density inconsistente. Não corrigir — usar as respostas como ponte para o conceito.</a:t>
+              <a:t>Notas: Deixar 2-3 respostas antes de nomear o conceito. A resposta certa é "depende" — ponte direta para a próxima seção.</a:t>
             </a:r>
             <a:endParaRPr lang="en-US" dirty="0"/>
           </a:p>
@@ -1668,12 +1757,7 @@
           <a:p>
             <a:r>
               <a:rPr lang="en-US" dirty="0"/>
-              <a:t>Notas: Revelar a causa depois das respostas da turma. Fixar: o problema não é o arquivo de imagem — é como o espaço UV foi distribuído. Isso prepara os três conceitos técnicos da aula.
-[!FIGURA]
-Objetivo didático: dar evidência visual concreta de que o mesmo material rende qualidade diferente conforme a área de UV — é o gancho que motiva toda a otimização da semana.
-Arquivo sugerido: assets/comparacao_nitido_borrado.webp
-Descrição: um único asset do kit renderizado com checkerboard (ou madeira), dividido ao meio: metade com UV normalizado (quadrados uniformes, nítido) e metade com island subdimensionada (quadrados grandes, borrado). Uma linha divide as duas condições.
-Como produzir: no Blender, duplicar o asset e aplicar checkerboard em ambos; num deles reduzir a escala de uma island no UV Editor. Renderizar lado a lado em Material Preview e compor a comparação no Krita com rótulos "nítido / borrado".</a:t>
+              <a:t>Notas: Não é uma ferramenta ruim — é uma ferramenta para um problema diferente do de hoje. O Hero Asset é a peça mais observada do semestre.</a:t>
             </a:r>
             <a:endParaRPr lang="en-US" dirty="0"/>
           </a:p>
@@ -1761,7 +1845,7 @@
           <a:p>
             <a:r>
               <a:rPr lang="en-US" dirty="0"/>
-              <a:t>Notas: O Stretch Overlay é ativado pelo ícone de gradiente na barra do UV Editor. Reforçar que ele mostra o problema ANTES de aplicar textura — não é preciso pintar para saber que vai dar errado. Adicionar um seam resolve parte; orientar/escalonar a island resolve o resto.</a:t>
+              <a:t>Notas: Três limitações do Smart UV Project isoladamente. Para um Hero Asset, não é suficiente sozinho — precisa de seams manuais por cima.</a:t>
             </a:r>
             <a:endParaRPr lang="en-US" dirty="0"/>
           </a:p>
@@ -1849,7 +1933,7 @@
           <a:p>
             <a:r>
               <a:rPr lang="en-US" dirty="0"/>
-              <a:t>Notas: Este é o conceito-chave da semana. Amarrar ao Projeto Integrador: num kit modular, todos os assets vistos à mesma distância no jogo devem ter texel density similar, senão a cena parece amadora. Verificação prática: com checkerboard, os quadrados devem ter tamanho visual similar entre os assets, na mesma escala.</a:t>
+              <a:t>Notas: Ligar ao critério 3 da Semana 3 (reaproveitamento) — um bom seam pensa também em onde a textura vai ser pintada depois.</a:t>
             </a:r>
             <a:endParaRPr lang="en-US" dirty="0"/>
           </a:p>
@@ -1937,7 +2021,7 @@
           <a:p>
             <a:r>
               <a:rPr lang="en-US" dirty="0"/>
-              <a:t>Notas: Cuidado conceitual importante: o Average calcula em relação à ÁREA DA FACE no 3D, não ao tamanho aparente no Viewport. Um objeto pequeno terá islands menores, um grande terá maiores — mas a DENSIDADE será igual. Antecipar a confusão do bloco de dificuldades do plano.</a:t>
+              <a:t>Notas: Reforçar que o critério técnico (Stretch Overlay, densidade de texel) já foi visto na Semana 2 em objetos neutros — a novidade de hoje é aplicar isso a uma peça real que vale nota.</a:t>
             </a:r>
             <a:endParaRPr lang="en-US" dirty="0"/>
           </a:p>
@@ -2025,7 +2109,7 @@
           <a:p>
             <a:r>
               <a:rPr lang="en-US" dirty="0"/>
-              <a:t>Notas: Padding maior evita bleeding em mipmaps, mas desperdiça espaço. Não usar/demonstrar UVPackmaster nesta aula — para não sobrecarregar a mini-aula, ele é citado apenas como nome e retomado com 5 min de recapitulação no início da Semana 6, quando o Asset 01 já estiver pronto para receber textura. Hoje o Pack Islands nativo do Blender é suficiente para o Asset 01 e o Asset 02.</a:t>
+              <a:t>Notas: Pergunta de checagem para repetir circulando no estúdio. Reforçar que a CF1 avalia domínio técnico do processo, não perfeição estética.</a:t>
             </a:r>
             <a:endParaRPr lang="en-US" dirty="0"/>
           </a:p>
@@ -2728,6 +2812,45 @@
 <file path=ppt/slides/slide18.xml><?xml version="1.0" encoding="utf-8"?>
 <p:sld xmlns:a="http://schemas.openxmlformats.org/drawingml/2006/main" xmlns:r="http://schemas.openxmlformats.org/officeDocument/2006/relationships" xmlns:p="http://schemas.openxmlformats.org/presentationml/2006/main">
   <p:cSld name="Slide 18">
+    <p:bg>
+      <p:bgPr>
+        <a:blipFill dpi="0" rotWithShape="1">
+          <a:blip r:embed="rId1">
+            <a:lum/>
+          </a:blip>
+          <a:srcRect/>
+          <a:stretch>
+            <a:fillRect/>
+          </a:stretch>
+        </a:blipFill>
+        <a:effectLst/>
+      </p:bgPr>
+    </p:bg>
+    <p:spTree>
+      <p:nvGrpSpPr>
+        <p:cNvPr id="1" name=""/>
+        <p:cNvGrpSpPr/>
+        <p:nvPr/>
+      </p:nvGrpSpPr>
+      <p:grpSpPr>
+        <a:xfrm>
+          <a:off x="0" y="0"/>
+          <a:ext cx="0" cy="0"/>
+          <a:chOff x="0" y="0"/>
+          <a:chExt cx="0" cy="0"/>
+        </a:xfrm>
+      </p:grpSpPr>
+    </p:spTree>
+  </p:cSld>
+  <p:clrMapOvr>
+    <a:masterClrMapping/>
+  </p:clrMapOvr>
+</p:sld>
+</file>
+
+<file path=ppt/slides/slide19.xml><?xml version="1.0" encoding="utf-8"?>
+<p:sld xmlns:a="http://schemas.openxmlformats.org/drawingml/2006/main" xmlns:r="http://schemas.openxmlformats.org/officeDocument/2006/relationships" xmlns:p="http://schemas.openxmlformats.org/presentationml/2006/main">
+  <p:cSld name="Slide 19">
     <p:bg>
       <p:bgPr>
         <a:blipFill dpi="0" rotWithShape="1">
